--- a/Final-Defense-corn-leaf-4716.pptx
+++ b/Final-Defense-corn-leaf-4716.pptx
@@ -5,7 +5,7 @@
     <p:sldMasterId id="2147483659" r:id="rId1"/>
   </p:sldMasterIdLst>
   <p:notesMasterIdLst>
-    <p:notesMasterId r:id="rId21"/>
+    <p:notesMasterId r:id="rId22"/>
   </p:notesMasterIdLst>
   <p:sldIdLst>
     <p:sldId id="256" r:id="rId2"/>
@@ -23,10 +23,11 @@
     <p:sldId id="310" r:id="rId14"/>
     <p:sldId id="300" r:id="rId15"/>
     <p:sldId id="305" r:id="rId16"/>
-    <p:sldId id="307" r:id="rId17"/>
-    <p:sldId id="291" r:id="rId18"/>
-    <p:sldId id="299" r:id="rId19"/>
-    <p:sldId id="295" r:id="rId20"/>
+    <p:sldId id="304" r:id="rId17"/>
+    <p:sldId id="307" r:id="rId18"/>
+    <p:sldId id="291" r:id="rId19"/>
+    <p:sldId id="299" r:id="rId20"/>
+    <p:sldId id="295" r:id="rId21"/>
   </p:sldIdLst>
   <p:sldSz cx="12192000" cy="6858000"/>
   <p:notesSz cx="6858000" cy="9144000"/>
@@ -8963,6 +8964,196 @@
         <p:cNvPr id="1" name="">
           <a:extLst>
             <a:ext uri="{FF2B5EF4-FFF2-40B4-BE49-F238E27FC236}">
+              <a16:creationId xmlns:a16="http://schemas.microsoft.com/office/drawing/2014/main" id="{13DDEE64-196C-B3D9-C82D-1C952ED4B751}"/>
+            </a:ext>
+          </a:extLst>
+        </p:cNvPr>
+        <p:cNvGrpSpPr/>
+        <p:nvPr/>
+      </p:nvGrpSpPr>
+      <p:grpSpPr>
+        <a:xfrm>
+          <a:off x="0" y="0"/>
+          <a:ext cx="0" cy="0"/>
+          <a:chOff x="0" y="0"/>
+          <a:chExt cx="0" cy="0"/>
+        </a:xfrm>
+      </p:grpSpPr>
+      <p:sp>
+        <p:nvSpPr>
+          <p:cNvPr id="2" name="Title 1">
+            <a:extLst>
+              <a:ext uri="{FF2B5EF4-FFF2-40B4-BE49-F238E27FC236}">
+                <a16:creationId xmlns:a16="http://schemas.microsoft.com/office/drawing/2014/main" id="{8DF13532-2D31-B35B-51FC-878A3DDEBA0F}"/>
+              </a:ext>
+            </a:extLst>
+          </p:cNvPr>
+          <p:cNvSpPr>
+            <a:spLocks noGrp="1"/>
+          </p:cNvSpPr>
+          <p:nvPr>
+            <p:ph type="title"/>
+          </p:nvPr>
+        </p:nvSpPr>
+        <p:spPr>
+          <a:xfrm>
+            <a:off x="1371600" y="160908"/>
+            <a:ext cx="9448800" cy="868362"/>
+          </a:xfrm>
+        </p:spPr>
+        <p:txBody>
+          <a:bodyPr>
+            <a:normAutofit/>
+          </a:bodyPr>
+          <a:lstStyle/>
+          <a:p>
+            <a:r>
+              <a:rPr lang="en-US" dirty="0">
+                <a:solidFill>
+                  <a:srgbClr val="7030A0"/>
+                </a:solidFill>
+                <a:latin typeface="Times New Roman" pitchFamily="18" charset="0"/>
+                <a:cs typeface="Times New Roman" pitchFamily="18" charset="0"/>
+              </a:rPr>
+              <a:t>Sample dataset and Expected output</a:t>
+            </a:r>
+          </a:p>
+        </p:txBody>
+      </p:sp>
+      <p:sp>
+        <p:nvSpPr>
+          <p:cNvPr id="4" name="Slide Number Placeholder 3">
+            <a:extLst>
+              <a:ext uri="{FF2B5EF4-FFF2-40B4-BE49-F238E27FC236}">
+                <a16:creationId xmlns:a16="http://schemas.microsoft.com/office/drawing/2014/main" id="{62D4510A-2A45-948C-55F1-C16B1F9D97CD}"/>
+              </a:ext>
+            </a:extLst>
+          </p:cNvPr>
+          <p:cNvSpPr>
+            <a:spLocks noGrp="1"/>
+          </p:cNvSpPr>
+          <p:nvPr>
+            <p:ph type="sldNum" sz="quarter" idx="16"/>
+          </p:nvPr>
+        </p:nvSpPr>
+        <p:spPr>
+          <a:xfrm>
+            <a:off x="9347200" y="5961645"/>
+            <a:ext cx="2844800" cy="365125"/>
+          </a:xfrm>
+        </p:spPr>
+        <p:txBody>
+          <a:bodyPr/>
+          <a:lstStyle/>
+          <a:p>
+            <a:pPr>
+              <a:defRPr/>
+            </a:pPr>
+            <a:fld id="{4CD333A3-7515-47B8-9EDC-EE0892D9C861}" type="slidenum">
+              <a:rPr lang="en-US" smtClean="0"/>
+              <a:pPr>
+                <a:defRPr/>
+              </a:pPr>
+              <a:t>16</a:t>
+            </a:fld>
+            <a:endParaRPr lang="en-US" dirty="0"/>
+          </a:p>
+        </p:txBody>
+      </p:sp>
+      <p:sp>
+        <p:nvSpPr>
+          <p:cNvPr id="3" name="TextBox 2">
+            <a:extLst>
+              <a:ext uri="{FF2B5EF4-FFF2-40B4-BE49-F238E27FC236}">
+                <a16:creationId xmlns:a16="http://schemas.microsoft.com/office/drawing/2014/main" id="{354740A8-B4CC-FE80-9727-34DB4B177478}"/>
+              </a:ext>
+            </a:extLst>
+          </p:cNvPr>
+          <p:cNvSpPr txBox="1"/>
+          <p:nvPr/>
+        </p:nvSpPr>
+        <p:spPr>
+          <a:xfrm>
+            <a:off x="8915400" y="6412468"/>
+            <a:ext cx="3276600" cy="369332"/>
+          </a:xfrm>
+          <a:prstGeom prst="rect">
+            <a:avLst/>
+          </a:prstGeom>
+          <a:solidFill>
+            <a:srgbClr val="4F81BD"/>
+          </a:solidFill>
+        </p:spPr>
+        <p:txBody>
+          <a:bodyPr wrap="square" rtlCol="0">
+            <a:spAutoFit/>
+          </a:bodyPr>
+          <a:lstStyle/>
+          <a:p>
+            <a:pPr algn="r"/>
+            <a:r>
+              <a:rPr lang="en-US" b="1" dirty="0">
+                <a:solidFill>
+                  <a:schemeClr val="bg1"/>
+                </a:solidFill>
+              </a:rPr>
+              <a:t>B.Sc. Final-Defense</a:t>
+            </a:r>
+          </a:p>
+        </p:txBody>
+      </p:sp>
+      <p:pic>
+        <p:nvPicPr>
+          <p:cNvPr id="5" name="image1.png">
+            <a:extLst>
+              <a:ext uri="{FF2B5EF4-FFF2-40B4-BE49-F238E27FC236}">
+                <a16:creationId xmlns:a16="http://schemas.microsoft.com/office/drawing/2014/main" id="{9588A303-9067-1497-2459-DA4CDAA67C50}"/>
+              </a:ext>
+            </a:extLst>
+          </p:cNvPr>
+          <p:cNvPicPr>
+            <a:picLocks noChangeAspect="1"/>
+          </p:cNvPicPr>
+          <p:nvPr/>
+        </p:nvPicPr>
+        <p:blipFill>
+          <a:blip r:embed="rId2"/>
+          <a:stretch>
+            <a:fillRect/>
+          </a:stretch>
+        </p:blipFill>
+        <p:spPr bwMode="auto">
+          <a:xfrm>
+            <a:off x="1524000" y="1173857"/>
+            <a:ext cx="8560306" cy="5059612"/>
+          </a:xfrm>
+          <a:prstGeom prst="rect">
+            <a:avLst/>
+          </a:prstGeom>
+          <a:noFill/>
+        </p:spPr>
+      </p:pic>
+    </p:spTree>
+    <p:extLst>
+      <p:ext uri="{BB962C8B-B14F-4D97-AF65-F5344CB8AC3E}">
+        <p14:creationId xmlns:p14="http://schemas.microsoft.com/office/powerpoint/2010/main" val="2592470236"/>
+      </p:ext>
+    </p:extLst>
+  </p:cSld>
+  <p:clrMapOvr>
+    <a:masterClrMapping/>
+  </p:clrMapOvr>
+</p:sld>
+</file>
+
+<file path=ppt/slides/slide17.xml><?xml version="1.0" encoding="utf-8"?>
+<p:sld xmlns:a="http://schemas.openxmlformats.org/drawingml/2006/main" xmlns:r="http://schemas.openxmlformats.org/officeDocument/2006/relationships" xmlns:p="http://schemas.openxmlformats.org/presentationml/2006/main">
+  <p:cSld>
+    <p:spTree>
+      <p:nvGrpSpPr>
+        <p:cNvPr id="1" name="">
+          <a:extLst>
+            <a:ext uri="{FF2B5EF4-FFF2-40B4-BE49-F238E27FC236}">
               <a16:creationId xmlns:a16="http://schemas.microsoft.com/office/drawing/2014/main" id="{39AACCF1-4663-0FAC-E557-C8C860184D62}"/>
             </a:ext>
           </a:extLst>
@@ -9058,7 +9249,7 @@
               <a:pPr>
                 <a:defRPr/>
               </a:pPr>
-              <a:t>16</a:t>
+              <a:t>17</a:t>
             </a:fld>
             <a:endParaRPr lang="en-US" dirty="0"/>
           </a:p>
@@ -9175,7 +9366,7 @@
 </p:sld>
 </file>
 
-<file path=ppt/slides/slide17.xml><?xml version="1.0" encoding="utf-8"?>
+<file path=ppt/slides/slide18.xml><?xml version="1.0" encoding="utf-8"?>
 <p:sld xmlns:a="http://schemas.openxmlformats.org/drawingml/2006/main" xmlns:r="http://schemas.openxmlformats.org/officeDocument/2006/relationships" xmlns:p="http://schemas.openxmlformats.org/presentationml/2006/main">
   <p:cSld>
     <p:spTree>
@@ -9258,7 +9449,7 @@
               <a:pPr>
                 <a:defRPr/>
               </a:pPr>
-              <a:t>17</a:t>
+              <a:t>18</a:t>
             </a:fld>
             <a:endParaRPr lang="en-US" dirty="0"/>
           </a:p>
@@ -9330,7 +9521,7 @@
         </p:spPr>
         <p:txBody>
           <a:bodyPr vertOverflow="overflow" horzOverflow="overflow" vert="horz" wrap="square" lIns="91440" tIns="45720" rIns="91440" bIns="45720" numCol="1" spcCol="0" rtlCol="0" fromWordArt="0" anchor="t" anchorCtr="0" forceAA="0" compatLnSpc="0">
-            <a:normAutofit fontScale="82500" lnSpcReduction="15000"/>
+            <a:normAutofit fontScale="82500" lnSpcReduction="10000"/>
           </a:bodyPr>
           <a:lstStyle/>
           <a:p>
@@ -9534,7 +9725,7 @@
 </p:sld>
 </file>
 
-<file path=ppt/slides/slide18.xml><?xml version="1.0" encoding="utf-8"?>
+<file path=ppt/slides/slide19.xml><?xml version="1.0" encoding="utf-8"?>
 <p:sld xmlns:a="http://schemas.openxmlformats.org/drawingml/2006/main" xmlns:r="http://schemas.openxmlformats.org/officeDocument/2006/relationships" xmlns:p="http://schemas.openxmlformats.org/presentationml/2006/main">
   <p:cSld>
     <p:spTree>
@@ -9635,7 +9826,7 @@
               <a:pPr>
                 <a:defRPr/>
               </a:pPr>
-              <a:t>18</a:t>
+              <a:t>19</a:t>
             </a:fld>
             <a:endParaRPr lang="en-US" dirty="0"/>
           </a:p>
@@ -10407,197 +10598,6 @@
     <p:extLst>
       <p:ext uri="{BB962C8B-B14F-4D97-AF65-F5344CB8AC3E}">
         <p14:creationId xmlns:p14="http://schemas.microsoft.com/office/powerpoint/2010/main" val="1905469527"/>
-      </p:ext>
-    </p:extLst>
-  </p:cSld>
-  <p:clrMapOvr>
-    <a:masterClrMapping/>
-  </p:clrMapOvr>
-</p:sld>
-</file>
-
-<file path=ppt/slides/slide19.xml><?xml version="1.0" encoding="utf-8"?>
-<p:sld xmlns:a="http://schemas.openxmlformats.org/drawingml/2006/main" xmlns:r="http://schemas.openxmlformats.org/officeDocument/2006/relationships" xmlns:p="http://schemas.openxmlformats.org/presentationml/2006/main">
-  <p:cSld>
-    <p:spTree>
-      <p:nvGrpSpPr>
-        <p:cNvPr id="1" name=""/>
-        <p:cNvGrpSpPr/>
-        <p:nvPr/>
-      </p:nvGrpSpPr>
-      <p:grpSpPr>
-        <a:xfrm>
-          <a:off x="0" y="0"/>
-          <a:ext cx="0" cy="0"/>
-          <a:chOff x="0" y="0"/>
-          <a:chExt cx="0" cy="0"/>
-        </a:xfrm>
-      </p:grpSpPr>
-      <p:sp>
-        <p:nvSpPr>
-          <p:cNvPr id="2" name="Title 1"/>
-          <p:cNvSpPr>
-            <a:spLocks noGrp="1"/>
-          </p:cNvSpPr>
-          <p:nvPr>
-            <p:ph type="title"/>
-          </p:nvPr>
-        </p:nvSpPr>
-        <p:spPr>
-          <a:xfrm>
-            <a:off x="1981200" y="274638"/>
-            <a:ext cx="8229600" cy="868362"/>
-          </a:xfrm>
-        </p:spPr>
-        <p:txBody>
-          <a:bodyPr/>
-          <a:lstStyle/>
-          <a:p>
-            <a:endParaRPr lang="en-US" dirty="0">
-              <a:solidFill>
-                <a:srgbClr val="7030A0"/>
-              </a:solidFill>
-            </a:endParaRPr>
-          </a:p>
-        </p:txBody>
-      </p:sp>
-      <p:sp>
-        <p:nvSpPr>
-          <p:cNvPr id="3" name="Content Placeholder 2"/>
-          <p:cNvSpPr>
-            <a:spLocks noGrp="1"/>
-          </p:cNvSpPr>
-          <p:nvPr>
-            <p:ph sz="quarter" idx="13"/>
-          </p:nvPr>
-        </p:nvSpPr>
-        <p:spPr/>
-        <p:txBody>
-          <a:bodyPr>
-            <a:normAutofit/>
-          </a:bodyPr>
-          <a:lstStyle/>
-          <a:p>
-            <a:pPr marL="0" indent="0" algn="ctr">
-              <a:buNone/>
-            </a:pPr>
-            <a:endParaRPr lang="en-US" sz="6000" b="1" dirty="0">
-              <a:solidFill>
-                <a:srgbClr val="7030A0"/>
-              </a:solidFill>
-              <a:latin typeface="Times New Roman" pitchFamily="18" charset="0"/>
-              <a:cs typeface="Times New Roman" pitchFamily="18" charset="0"/>
-            </a:endParaRPr>
-          </a:p>
-          <a:p>
-            <a:pPr marL="0" indent="0" algn="ctr">
-              <a:buNone/>
-            </a:pPr>
-            <a:r>
-              <a:rPr lang="en-US" sz="6000" b="1" dirty="0">
-                <a:solidFill>
-                  <a:srgbClr val="7030A0"/>
-                </a:solidFill>
-                <a:latin typeface="Times New Roman" pitchFamily="18" charset="0"/>
-                <a:cs typeface="Times New Roman" pitchFamily="18" charset="0"/>
-              </a:rPr>
-              <a:t>THANK YOU</a:t>
-            </a:r>
-          </a:p>
-          <a:p>
-            <a:pPr marL="0" indent="0" algn="r">
-              <a:buNone/>
-            </a:pPr>
-            <a:endParaRPr lang="en-US" sz="3000" dirty="0">
-              <a:solidFill>
-                <a:schemeClr val="tx1"/>
-              </a:solidFill>
-              <a:latin typeface="Times New Roman" pitchFamily="18" charset="0"/>
-              <a:cs typeface="Times New Roman" pitchFamily="18" charset="0"/>
-            </a:endParaRPr>
-          </a:p>
-        </p:txBody>
-      </p:sp>
-      <p:sp>
-        <p:nvSpPr>
-          <p:cNvPr id="4" name="Slide Number Placeholder 3"/>
-          <p:cNvSpPr>
-            <a:spLocks noGrp="1"/>
-          </p:cNvSpPr>
-          <p:nvPr>
-            <p:ph type="sldNum" sz="quarter" idx="16"/>
-          </p:nvPr>
-        </p:nvSpPr>
-        <p:spPr>
-          <a:xfrm>
-            <a:off x="9350248" y="5959475"/>
-            <a:ext cx="2844800" cy="365125"/>
-          </a:xfrm>
-        </p:spPr>
-        <p:txBody>
-          <a:bodyPr/>
-          <a:lstStyle/>
-          <a:p>
-            <a:pPr>
-              <a:defRPr/>
-            </a:pPr>
-            <a:fld id="{4CD333A3-7515-47B8-9EDC-EE0892D9C861}" type="slidenum">
-              <a:rPr lang="en-US" smtClean="0"/>
-              <a:pPr>
-                <a:defRPr/>
-              </a:pPr>
-              <a:t>19</a:t>
-            </a:fld>
-            <a:endParaRPr lang="en-US" dirty="0"/>
-          </a:p>
-        </p:txBody>
-      </p:sp>
-      <p:sp>
-        <p:nvSpPr>
-          <p:cNvPr id="5" name="TextBox 4">
-            <a:extLst>
-              <a:ext uri="{FF2B5EF4-FFF2-40B4-BE49-F238E27FC236}">
-                <a16:creationId xmlns:a16="http://schemas.microsoft.com/office/drawing/2014/main" id="{2EBB629C-0461-0D8C-DA5C-C136AD5443E5}"/>
-              </a:ext>
-            </a:extLst>
-          </p:cNvPr>
-          <p:cNvSpPr txBox="1"/>
-          <p:nvPr/>
-        </p:nvSpPr>
-        <p:spPr>
-          <a:xfrm>
-            <a:off x="8915400" y="6412468"/>
-            <a:ext cx="3276600" cy="369332"/>
-          </a:xfrm>
-          <a:prstGeom prst="rect">
-            <a:avLst/>
-          </a:prstGeom>
-          <a:solidFill>
-            <a:srgbClr val="4F81BD"/>
-          </a:solidFill>
-        </p:spPr>
-        <p:txBody>
-          <a:bodyPr wrap="square" rtlCol="0">
-            <a:spAutoFit/>
-          </a:bodyPr>
-          <a:lstStyle/>
-          <a:p>
-            <a:pPr algn="r"/>
-            <a:r>
-              <a:rPr lang="en-US" b="1" dirty="0">
-                <a:solidFill>
-                  <a:schemeClr val="bg1"/>
-                </a:solidFill>
-              </a:rPr>
-              <a:t>B.Sc. Final-Defense</a:t>
-            </a:r>
-          </a:p>
-        </p:txBody>
-      </p:sp>
-    </p:spTree>
-    <p:extLst>
-      <p:ext uri="{BB962C8B-B14F-4D97-AF65-F5344CB8AC3E}">
-        <p14:creationId xmlns:p14="http://schemas.microsoft.com/office/powerpoint/2010/main" val="2459516608"/>
       </p:ext>
     </p:extLst>
   </p:cSld>
@@ -10923,6 +10923,197 @@
         </p:txBody>
       </p:sp>
     </p:spTree>
+  </p:cSld>
+  <p:clrMapOvr>
+    <a:masterClrMapping/>
+  </p:clrMapOvr>
+</p:sld>
+</file>
+
+<file path=ppt/slides/slide20.xml><?xml version="1.0" encoding="utf-8"?>
+<p:sld xmlns:a="http://schemas.openxmlformats.org/drawingml/2006/main" xmlns:r="http://schemas.openxmlformats.org/officeDocument/2006/relationships" xmlns:p="http://schemas.openxmlformats.org/presentationml/2006/main">
+  <p:cSld>
+    <p:spTree>
+      <p:nvGrpSpPr>
+        <p:cNvPr id="1" name=""/>
+        <p:cNvGrpSpPr/>
+        <p:nvPr/>
+      </p:nvGrpSpPr>
+      <p:grpSpPr>
+        <a:xfrm>
+          <a:off x="0" y="0"/>
+          <a:ext cx="0" cy="0"/>
+          <a:chOff x="0" y="0"/>
+          <a:chExt cx="0" cy="0"/>
+        </a:xfrm>
+      </p:grpSpPr>
+      <p:sp>
+        <p:nvSpPr>
+          <p:cNvPr id="2" name="Title 1"/>
+          <p:cNvSpPr>
+            <a:spLocks noGrp="1"/>
+          </p:cNvSpPr>
+          <p:nvPr>
+            <p:ph type="title"/>
+          </p:nvPr>
+        </p:nvSpPr>
+        <p:spPr>
+          <a:xfrm>
+            <a:off x="1981200" y="274638"/>
+            <a:ext cx="8229600" cy="868362"/>
+          </a:xfrm>
+        </p:spPr>
+        <p:txBody>
+          <a:bodyPr/>
+          <a:lstStyle/>
+          <a:p>
+            <a:endParaRPr lang="en-US" dirty="0">
+              <a:solidFill>
+                <a:srgbClr val="7030A0"/>
+              </a:solidFill>
+            </a:endParaRPr>
+          </a:p>
+        </p:txBody>
+      </p:sp>
+      <p:sp>
+        <p:nvSpPr>
+          <p:cNvPr id="3" name="Content Placeholder 2"/>
+          <p:cNvSpPr>
+            <a:spLocks noGrp="1"/>
+          </p:cNvSpPr>
+          <p:nvPr>
+            <p:ph sz="quarter" idx="13"/>
+          </p:nvPr>
+        </p:nvSpPr>
+        <p:spPr/>
+        <p:txBody>
+          <a:bodyPr>
+            <a:normAutofit/>
+          </a:bodyPr>
+          <a:lstStyle/>
+          <a:p>
+            <a:pPr marL="0" indent="0" algn="ctr">
+              <a:buNone/>
+            </a:pPr>
+            <a:endParaRPr lang="en-US" sz="6000" b="1" dirty="0">
+              <a:solidFill>
+                <a:srgbClr val="7030A0"/>
+              </a:solidFill>
+              <a:latin typeface="Times New Roman" pitchFamily="18" charset="0"/>
+              <a:cs typeface="Times New Roman" pitchFamily="18" charset="0"/>
+            </a:endParaRPr>
+          </a:p>
+          <a:p>
+            <a:pPr marL="0" indent="0" algn="ctr">
+              <a:buNone/>
+            </a:pPr>
+            <a:r>
+              <a:rPr lang="en-US" sz="6000" b="1" dirty="0">
+                <a:solidFill>
+                  <a:srgbClr val="7030A0"/>
+                </a:solidFill>
+                <a:latin typeface="Times New Roman" pitchFamily="18" charset="0"/>
+                <a:cs typeface="Times New Roman" pitchFamily="18" charset="0"/>
+              </a:rPr>
+              <a:t>THANK YOU</a:t>
+            </a:r>
+          </a:p>
+          <a:p>
+            <a:pPr marL="0" indent="0" algn="r">
+              <a:buNone/>
+            </a:pPr>
+            <a:endParaRPr lang="en-US" sz="3000" dirty="0">
+              <a:solidFill>
+                <a:schemeClr val="tx1"/>
+              </a:solidFill>
+              <a:latin typeface="Times New Roman" pitchFamily="18" charset="0"/>
+              <a:cs typeface="Times New Roman" pitchFamily="18" charset="0"/>
+            </a:endParaRPr>
+          </a:p>
+        </p:txBody>
+      </p:sp>
+      <p:sp>
+        <p:nvSpPr>
+          <p:cNvPr id="4" name="Slide Number Placeholder 3"/>
+          <p:cNvSpPr>
+            <a:spLocks noGrp="1"/>
+          </p:cNvSpPr>
+          <p:nvPr>
+            <p:ph type="sldNum" sz="quarter" idx="16"/>
+          </p:nvPr>
+        </p:nvSpPr>
+        <p:spPr>
+          <a:xfrm>
+            <a:off x="9350248" y="5959475"/>
+            <a:ext cx="2844800" cy="365125"/>
+          </a:xfrm>
+        </p:spPr>
+        <p:txBody>
+          <a:bodyPr/>
+          <a:lstStyle/>
+          <a:p>
+            <a:pPr>
+              <a:defRPr/>
+            </a:pPr>
+            <a:fld id="{4CD333A3-7515-47B8-9EDC-EE0892D9C861}" type="slidenum">
+              <a:rPr lang="en-US" smtClean="0"/>
+              <a:pPr>
+                <a:defRPr/>
+              </a:pPr>
+              <a:t>20</a:t>
+            </a:fld>
+            <a:endParaRPr lang="en-US" dirty="0"/>
+          </a:p>
+        </p:txBody>
+      </p:sp>
+      <p:sp>
+        <p:nvSpPr>
+          <p:cNvPr id="5" name="TextBox 4">
+            <a:extLst>
+              <a:ext uri="{FF2B5EF4-FFF2-40B4-BE49-F238E27FC236}">
+                <a16:creationId xmlns:a16="http://schemas.microsoft.com/office/drawing/2014/main" id="{2EBB629C-0461-0D8C-DA5C-C136AD5443E5}"/>
+              </a:ext>
+            </a:extLst>
+          </p:cNvPr>
+          <p:cNvSpPr txBox="1"/>
+          <p:nvPr/>
+        </p:nvSpPr>
+        <p:spPr>
+          <a:xfrm>
+            <a:off x="8915400" y="6412468"/>
+            <a:ext cx="3276600" cy="369332"/>
+          </a:xfrm>
+          <a:prstGeom prst="rect">
+            <a:avLst/>
+          </a:prstGeom>
+          <a:solidFill>
+            <a:srgbClr val="4F81BD"/>
+          </a:solidFill>
+        </p:spPr>
+        <p:txBody>
+          <a:bodyPr wrap="square" rtlCol="0">
+            <a:spAutoFit/>
+          </a:bodyPr>
+          <a:lstStyle/>
+          <a:p>
+            <a:pPr algn="r"/>
+            <a:r>
+              <a:rPr lang="en-US" b="1" dirty="0">
+                <a:solidFill>
+                  <a:schemeClr val="bg1"/>
+                </a:solidFill>
+              </a:rPr>
+              <a:t>B.Sc. Final-Defense</a:t>
+            </a:r>
+          </a:p>
+        </p:txBody>
+      </p:sp>
+    </p:spTree>
+    <p:extLst>
+      <p:ext uri="{BB962C8B-B14F-4D97-AF65-F5344CB8AC3E}">
+        <p14:creationId xmlns:p14="http://schemas.microsoft.com/office/powerpoint/2010/main" val="2459516608"/>
+      </p:ext>
+    </p:extLst>
   </p:cSld>
   <p:clrMapOvr>
     <a:masterClrMapping/>
